--- a/dist/weeks-포트폴리오제작/포트폴리오제작_05주차_콘텐츠구조화.pptx
+++ b/dist/weeks-포트폴리오제작/포트폴리오제작_05주차_콘텐츠구조화.pptx
@@ -4161,7 +4161,96 @@
         <p:spPr>
           <a:xfrm>
             <a:off x="640080" y="1627632"/>
-            <a:ext cx="5254600" cy="4078224"/>
+            <a:ext cx="5254600" cy="3712464"/>
+          </a:xfrm>
+          <a:prstGeom prst="rect">
+            <a:avLst/>
+          </a:prstGeom>
+          <a:solidFill>
+            <a:srgbClr val="FFFFFF"/>
+          </a:solidFill>
+          <a:ln w="12700">
+            <a:solidFill>
+              <a:srgbClr val="111111"/>
+            </a:solidFill>
+            <a:prstDash val="solid"/>
+          </a:ln>
+        </p:spPr>
+      </p:sp>
+      <p:sp>
+        <p:nvSpPr>
+          <p:cNvPr id="10" name="Shape 8"/>
+          <p:cNvSpPr/>
+          <p:nvPr/>
+        </p:nvSpPr>
+        <p:spPr>
+          <a:xfrm>
+            <a:off x="640080" y="1627632"/>
+            <a:ext cx="5254600" cy="64008"/>
+          </a:xfrm>
+          <a:prstGeom prst="rect">
+            <a:avLst/>
+          </a:prstGeom>
+          <a:solidFill>
+            <a:srgbClr val="111111"/>
+          </a:solidFill>
+          <a:ln w="12700">
+            <a:solidFill>
+              <a:srgbClr val="111111"/>
+            </a:solidFill>
+            <a:prstDash val="solid"/>
+          </a:ln>
+        </p:spPr>
+      </p:sp>
+      <p:sp>
+        <p:nvSpPr>
+          <p:cNvPr id="11" name="Text 9"/>
+          <p:cNvSpPr/>
+          <p:nvPr/>
+        </p:nvSpPr>
+        <p:spPr>
+          <a:xfrm>
+            <a:off x="1042416" y="1901952"/>
+            <a:ext cx="4449928" cy="365760"/>
+          </a:xfrm>
+          <a:prstGeom prst="rect">
+            <a:avLst/>
+          </a:prstGeom>
+          <a:noFill/>
+          <a:ln/>
+        </p:spPr>
+        <p:txBody>
+          <a:bodyPr wrap="square" lIns="0" tIns="0" rIns="0" bIns="0" rtlCol="0" anchor="ctr"/>
+          <a:lstStyle/>
+          <a:p>
+            <a:pPr indent="0" marL="0">
+              <a:buNone/>
+            </a:pPr>
+            <a:r>
+              <a:rPr lang="en-US" sz="1700" dirty="0">
+                <a:solidFill>
+                  <a:srgbClr val="111111"/>
+                </a:solidFill>
+                <a:latin typeface="Pretendard SemiBold" pitchFamily="34" charset="0"/>
+                <a:ea typeface="Pretendard SemiBold" pitchFamily="34" charset="-122"/>
+                <a:cs typeface="Pretendard SemiBold" pitchFamily="34" charset="-120"/>
+              </a:rPr>
+              <a:t>구조를 같게</a:t>
+            </a:r>
+            <a:endParaRPr lang="en-US" sz="1700" dirty="0"/>
+          </a:p>
+        </p:txBody>
+      </p:sp>
+      <p:sp>
+        <p:nvSpPr>
+          <p:cNvPr id="12" name="Shape 10"/>
+          <p:cNvSpPr/>
+          <p:nvPr/>
+        </p:nvSpPr>
+        <p:spPr>
+          <a:xfrm>
+            <a:off x="6297016" y="1627632"/>
+            <a:ext cx="5254600" cy="3712464"/>
           </a:xfrm>
           <a:prstGeom prst="rect">
             <a:avLst/>
@@ -4179,13 +4268,13 @@
       </p:sp>
       <p:sp>
         <p:nvSpPr>
-          <p:cNvPr id="10" name="Text 8"/>
-          <p:cNvSpPr/>
-          <p:nvPr/>
-        </p:nvSpPr>
-        <p:spPr>
-          <a:xfrm>
-            <a:off x="1042416" y="1901952"/>
+          <p:cNvPr id="13" name="Text 11"/>
+          <p:cNvSpPr/>
+          <p:nvPr/>
+        </p:nvSpPr>
+        <p:spPr>
+          <a:xfrm>
+            <a:off x="6699352" y="1901952"/>
             <a:ext cx="4449928" cy="365760"/>
           </a:xfrm>
           <a:prstGeom prst="rect">
@@ -4204,13 +4293,13 @@
             <a:r>
               <a:rPr lang="en-US" sz="1700" dirty="0">
                 <a:solidFill>
-                  <a:srgbClr val="111111"/>
+                  <a:srgbClr val="9B9B9B"/>
                 </a:solidFill>
                 <a:latin typeface="Pretendard SemiBold" pitchFamily="34" charset="0"/>
                 <a:ea typeface="Pretendard SemiBold" pitchFamily="34" charset="-122"/>
                 <a:cs typeface="Pretendard SemiBold" pitchFamily="34" charset="-120"/>
               </a:rPr>
-              <a:t>구조를 같게</a:t>
+              <a:t>프로젝트마다 다르게</a:t>
             </a:r>
             <a:endParaRPr lang="en-US" sz="1700" dirty="0"/>
           </a:p>
@@ -4218,71 +4307,7 @@
       </p:sp>
       <p:sp>
         <p:nvSpPr>
-          <p:cNvPr id="11" name="Shape 9"/>
-          <p:cNvSpPr/>
-          <p:nvPr/>
-        </p:nvSpPr>
-        <p:spPr>
-          <a:xfrm>
-            <a:off x="6297016" y="1627632"/>
-            <a:ext cx="5254600" cy="4078224"/>
-          </a:xfrm>
-          <a:prstGeom prst="rect">
-            <a:avLst/>
-          </a:prstGeom>
-          <a:solidFill>
-            <a:srgbClr val="FFFFFF"/>
-          </a:solidFill>
-          <a:ln w="12700">
-            <a:solidFill>
-              <a:srgbClr val="DCDCDC"/>
-            </a:solidFill>
-            <a:prstDash val="solid"/>
-          </a:ln>
-        </p:spPr>
-      </p:sp>
-      <p:sp>
-        <p:nvSpPr>
-          <p:cNvPr id="12" name="Text 10"/>
-          <p:cNvSpPr/>
-          <p:nvPr/>
-        </p:nvSpPr>
-        <p:spPr>
-          <a:xfrm>
-            <a:off x="6699352" y="1901952"/>
-            <a:ext cx="4449928" cy="365760"/>
-          </a:xfrm>
-          <a:prstGeom prst="rect">
-            <a:avLst/>
-          </a:prstGeom>
-          <a:noFill/>
-          <a:ln/>
-        </p:spPr>
-        <p:txBody>
-          <a:bodyPr wrap="square" lIns="0" tIns="0" rIns="0" bIns="0" rtlCol="0" anchor="ctr"/>
-          <a:lstStyle/>
-          <a:p>
-            <a:pPr indent="0" marL="0">
-              <a:buNone/>
-            </a:pPr>
-            <a:r>
-              <a:rPr lang="en-US" sz="1700" dirty="0">
-                <a:solidFill>
-                  <a:srgbClr val="9B9B9B"/>
-                </a:solidFill>
-                <a:latin typeface="Pretendard SemiBold" pitchFamily="34" charset="0"/>
-                <a:ea typeface="Pretendard SemiBold" pitchFamily="34" charset="-122"/>
-                <a:cs typeface="Pretendard SemiBold" pitchFamily="34" charset="-120"/>
-              </a:rPr>
-              <a:t>프로젝트마다 다르게</a:t>
-            </a:r>
-            <a:endParaRPr lang="en-US" sz="1700" dirty="0"/>
-          </a:p>
-        </p:txBody>
-      </p:sp>
-      <p:sp>
-        <p:nvSpPr>
-          <p:cNvPr id="13" name="Text 11"/>
+          <p:cNvPr id="14" name="Text 12"/>
           <p:cNvSpPr/>
           <p:nvPr/>
         </p:nvSpPr>
@@ -4321,14 +4346,14 @@
       </p:sp>
       <p:sp>
         <p:nvSpPr>
-          <p:cNvPr id="14" name="Text 12"/>
+          <p:cNvPr id="15" name="Text 13"/>
           <p:cNvSpPr/>
           <p:nvPr/>
         </p:nvSpPr>
         <p:spPr>
           <a:xfrm>
             <a:off x="1042416" y="2688336"/>
-            <a:ext cx="4449928" cy="384048"/>
+            <a:ext cx="4449928" cy="329184"/>
           </a:xfrm>
           <a:prstGeom prst="rect">
             <a:avLst/>
@@ -4347,7 +4372,7 @@
               <a:buNone/>
             </a:pPr>
             <a:r>
-              <a:rPr lang="en-US" sz="1150" dirty="0">
+              <a:rPr lang="en-US" sz="1150" b="1" dirty="0">
                 <a:solidFill>
                   <a:srgbClr val="1F1F1F"/>
                 </a:solidFill>
@@ -4363,7 +4388,7 @@
       </p:sp>
       <p:sp>
         <p:nvSpPr>
-          <p:cNvPr id="15" name="Text 13"/>
+          <p:cNvPr id="16" name="Text 14"/>
           <p:cNvSpPr/>
           <p:nvPr/>
         </p:nvSpPr>
@@ -4402,14 +4427,14 @@
       </p:sp>
       <p:sp>
         <p:nvSpPr>
-          <p:cNvPr id="16" name="Text 14"/>
+          <p:cNvPr id="17" name="Text 15"/>
           <p:cNvSpPr/>
           <p:nvPr/>
         </p:nvSpPr>
         <p:spPr>
           <a:xfrm>
             <a:off x="6699352" y="2688336"/>
-            <a:ext cx="4449928" cy="384048"/>
+            <a:ext cx="4449928" cy="329184"/>
           </a:xfrm>
           <a:prstGeom prst="rect">
             <a:avLst/>
@@ -4444,13 +4469,13 @@
       </p:sp>
       <p:sp>
         <p:nvSpPr>
-          <p:cNvPr id="17" name="Shape 15"/>
-          <p:cNvSpPr/>
-          <p:nvPr/>
-        </p:nvSpPr>
-        <p:spPr>
-          <a:xfrm>
-            <a:off x="1042416" y="3054096"/>
+          <p:cNvPr id="18" name="Shape 16"/>
+          <p:cNvSpPr/>
+          <p:nvPr/>
+        </p:nvSpPr>
+        <p:spPr>
+          <a:xfrm>
+            <a:off x="1042416" y="2980944"/>
             <a:ext cx="4449928" cy="7315"/>
           </a:xfrm>
           <a:prstGeom prst="rect">
@@ -4469,13 +4494,13 @@
       </p:sp>
       <p:sp>
         <p:nvSpPr>
-          <p:cNvPr id="18" name="Shape 16"/>
-          <p:cNvSpPr/>
-          <p:nvPr/>
-        </p:nvSpPr>
-        <p:spPr>
-          <a:xfrm>
-            <a:off x="6699352" y="3054096"/>
+          <p:cNvPr id="19" name="Shape 17"/>
+          <p:cNvSpPr/>
+          <p:nvPr/>
+        </p:nvSpPr>
+        <p:spPr>
+          <a:xfrm>
+            <a:off x="6699352" y="2980944"/>
             <a:ext cx="4449928" cy="7315"/>
           </a:xfrm>
           <a:prstGeom prst="rect">
@@ -4494,13 +4519,13 @@
       </p:sp>
       <p:sp>
         <p:nvSpPr>
-          <p:cNvPr id="19" name="Text 17"/>
-          <p:cNvSpPr/>
-          <p:nvPr/>
-        </p:nvSpPr>
-        <p:spPr>
-          <a:xfrm>
-            <a:off x="1042416" y="3108960"/>
+          <p:cNvPr id="20" name="Text 18"/>
+          <p:cNvSpPr/>
+          <p:nvPr/>
+        </p:nvSpPr>
+        <p:spPr>
+          <a:xfrm>
+            <a:off x="1042416" y="3035808"/>
             <a:ext cx="2011680" cy="274320"/>
           </a:xfrm>
           <a:prstGeom prst="rect">
@@ -4533,14 +4558,14 @@
       </p:sp>
       <p:sp>
         <p:nvSpPr>
-          <p:cNvPr id="20" name="Text 18"/>
-          <p:cNvSpPr/>
-          <p:nvPr/>
-        </p:nvSpPr>
-        <p:spPr>
-          <a:xfrm>
-            <a:off x="1042416" y="3346704"/>
-            <a:ext cx="4449928" cy="384048"/>
+          <p:cNvPr id="21" name="Text 19"/>
+          <p:cNvSpPr/>
+          <p:nvPr/>
+        </p:nvSpPr>
+        <p:spPr>
+          <a:xfrm>
+            <a:off x="1042416" y="3273552"/>
+            <a:ext cx="4449928" cy="329184"/>
           </a:xfrm>
           <a:prstGeom prst="rect">
             <a:avLst/>
@@ -4559,7 +4584,7 @@
               <a:buNone/>
             </a:pPr>
             <a:r>
-              <a:rPr lang="en-US" sz="1150" dirty="0">
+              <a:rPr lang="en-US" sz="1150" b="1" dirty="0">
                 <a:solidFill>
                   <a:srgbClr val="1F1F1F"/>
                 </a:solidFill>
@@ -4575,13 +4600,13 @@
       </p:sp>
       <p:sp>
         <p:nvSpPr>
-          <p:cNvPr id="21" name="Text 19"/>
-          <p:cNvSpPr/>
-          <p:nvPr/>
-        </p:nvSpPr>
-        <p:spPr>
-          <a:xfrm>
-            <a:off x="6699352" y="3108960"/>
+          <p:cNvPr id="22" name="Text 20"/>
+          <p:cNvSpPr/>
+          <p:nvPr/>
+        </p:nvSpPr>
+        <p:spPr>
+          <a:xfrm>
+            <a:off x="6699352" y="3035808"/>
             <a:ext cx="2011680" cy="274320"/>
           </a:xfrm>
           <a:prstGeom prst="rect">
@@ -4614,14 +4639,14 @@
       </p:sp>
       <p:sp>
         <p:nvSpPr>
-          <p:cNvPr id="22" name="Text 20"/>
-          <p:cNvSpPr/>
-          <p:nvPr/>
-        </p:nvSpPr>
-        <p:spPr>
-          <a:xfrm>
-            <a:off x="6699352" y="3346704"/>
-            <a:ext cx="4449928" cy="384048"/>
+          <p:cNvPr id="23" name="Text 21"/>
+          <p:cNvSpPr/>
+          <p:nvPr/>
+        </p:nvSpPr>
+        <p:spPr>
+          <a:xfrm>
+            <a:off x="6699352" y="3273552"/>
+            <a:ext cx="4449928" cy="329184"/>
           </a:xfrm>
           <a:prstGeom prst="rect">
             <a:avLst/>
@@ -4656,13 +4681,13 @@
       </p:sp>
       <p:sp>
         <p:nvSpPr>
-          <p:cNvPr id="23" name="Shape 21"/>
-          <p:cNvSpPr/>
-          <p:nvPr/>
-        </p:nvSpPr>
-        <p:spPr>
-          <a:xfrm>
-            <a:off x="1042416" y="3712464"/>
+          <p:cNvPr id="24" name="Shape 22"/>
+          <p:cNvSpPr/>
+          <p:nvPr/>
+        </p:nvSpPr>
+        <p:spPr>
+          <a:xfrm>
+            <a:off x="1042416" y="3566160"/>
             <a:ext cx="4449928" cy="7315"/>
           </a:xfrm>
           <a:prstGeom prst="rect">
@@ -4681,13 +4706,13 @@
       </p:sp>
       <p:sp>
         <p:nvSpPr>
-          <p:cNvPr id="24" name="Shape 22"/>
-          <p:cNvSpPr/>
-          <p:nvPr/>
-        </p:nvSpPr>
-        <p:spPr>
-          <a:xfrm>
-            <a:off x="6699352" y="3712464"/>
+          <p:cNvPr id="25" name="Shape 23"/>
+          <p:cNvSpPr/>
+          <p:nvPr/>
+        </p:nvSpPr>
+        <p:spPr>
+          <a:xfrm>
+            <a:off x="6699352" y="3566160"/>
             <a:ext cx="4449928" cy="7315"/>
           </a:xfrm>
           <a:prstGeom prst="rect">
@@ -4706,13 +4731,13 @@
       </p:sp>
       <p:sp>
         <p:nvSpPr>
-          <p:cNvPr id="25" name="Text 23"/>
-          <p:cNvSpPr/>
-          <p:nvPr/>
-        </p:nvSpPr>
-        <p:spPr>
-          <a:xfrm>
-            <a:off x="1042416" y="3767328"/>
+          <p:cNvPr id="26" name="Text 24"/>
+          <p:cNvSpPr/>
+          <p:nvPr/>
+        </p:nvSpPr>
+        <p:spPr>
+          <a:xfrm>
+            <a:off x="1042416" y="3621024"/>
             <a:ext cx="2011680" cy="274320"/>
           </a:xfrm>
           <a:prstGeom prst="rect">
@@ -4745,14 +4770,14 @@
       </p:sp>
       <p:sp>
         <p:nvSpPr>
-          <p:cNvPr id="26" name="Text 24"/>
-          <p:cNvSpPr/>
-          <p:nvPr/>
-        </p:nvSpPr>
-        <p:spPr>
-          <a:xfrm>
-            <a:off x="1042416" y="4005072"/>
-            <a:ext cx="4449928" cy="384048"/>
+          <p:cNvPr id="27" name="Text 25"/>
+          <p:cNvSpPr/>
+          <p:nvPr/>
+        </p:nvSpPr>
+        <p:spPr>
+          <a:xfrm>
+            <a:off x="1042416" y="3858768"/>
+            <a:ext cx="4449928" cy="329184"/>
           </a:xfrm>
           <a:prstGeom prst="rect">
             <a:avLst/>
@@ -4771,7 +4796,7 @@
               <a:buNone/>
             </a:pPr>
             <a:r>
-              <a:rPr lang="en-US" sz="1150" dirty="0">
+              <a:rPr lang="en-US" sz="1150" b="1" dirty="0">
                 <a:solidFill>
                   <a:srgbClr val="1F1F1F"/>
                 </a:solidFill>
@@ -4787,13 +4812,13 @@
       </p:sp>
       <p:sp>
         <p:nvSpPr>
-          <p:cNvPr id="27" name="Text 25"/>
-          <p:cNvSpPr/>
-          <p:nvPr/>
-        </p:nvSpPr>
-        <p:spPr>
-          <a:xfrm>
-            <a:off x="6699352" y="3767328"/>
+          <p:cNvPr id="28" name="Text 26"/>
+          <p:cNvSpPr/>
+          <p:nvPr/>
+        </p:nvSpPr>
+        <p:spPr>
+          <a:xfrm>
+            <a:off x="6699352" y="3621024"/>
             <a:ext cx="2011680" cy="274320"/>
           </a:xfrm>
           <a:prstGeom prst="rect">
@@ -4826,14 +4851,14 @@
       </p:sp>
       <p:sp>
         <p:nvSpPr>
-          <p:cNvPr id="28" name="Text 26"/>
-          <p:cNvSpPr/>
-          <p:nvPr/>
-        </p:nvSpPr>
-        <p:spPr>
-          <a:xfrm>
-            <a:off x="6699352" y="4005072"/>
-            <a:ext cx="4449928" cy="384048"/>
+          <p:cNvPr id="29" name="Text 27"/>
+          <p:cNvSpPr/>
+          <p:nvPr/>
+        </p:nvSpPr>
+        <p:spPr>
+          <a:xfrm>
+            <a:off x="6699352" y="3858768"/>
+            <a:ext cx="4449928" cy="329184"/>
           </a:xfrm>
           <a:prstGeom prst="rect">
             <a:avLst/>
@@ -4868,13 +4893,13 @@
       </p:sp>
       <p:sp>
         <p:nvSpPr>
-          <p:cNvPr id="29" name="Shape 27"/>
-          <p:cNvSpPr/>
-          <p:nvPr/>
-        </p:nvSpPr>
-        <p:spPr>
-          <a:xfrm>
-            <a:off x="1042416" y="4370832"/>
+          <p:cNvPr id="30" name="Shape 28"/>
+          <p:cNvSpPr/>
+          <p:nvPr/>
+        </p:nvSpPr>
+        <p:spPr>
+          <a:xfrm>
+            <a:off x="1042416" y="4151376"/>
             <a:ext cx="4449928" cy="7315"/>
           </a:xfrm>
           <a:prstGeom prst="rect">
@@ -4893,13 +4918,13 @@
       </p:sp>
       <p:sp>
         <p:nvSpPr>
-          <p:cNvPr id="30" name="Shape 28"/>
-          <p:cNvSpPr/>
-          <p:nvPr/>
-        </p:nvSpPr>
-        <p:spPr>
-          <a:xfrm>
-            <a:off x="6699352" y="4370832"/>
+          <p:cNvPr id="31" name="Shape 29"/>
+          <p:cNvSpPr/>
+          <p:nvPr/>
+        </p:nvSpPr>
+        <p:spPr>
+          <a:xfrm>
+            <a:off x="6699352" y="4151376"/>
             <a:ext cx="4449928" cy="7315"/>
           </a:xfrm>
           <a:prstGeom prst="rect">
@@ -4918,13 +4943,13 @@
       </p:sp>
       <p:sp>
         <p:nvSpPr>
-          <p:cNvPr id="31" name="Text 29"/>
-          <p:cNvSpPr/>
-          <p:nvPr/>
-        </p:nvSpPr>
-        <p:spPr>
-          <a:xfrm>
-            <a:off x="1042416" y="4425696"/>
+          <p:cNvPr id="32" name="Text 30"/>
+          <p:cNvSpPr/>
+          <p:nvPr/>
+        </p:nvSpPr>
+        <p:spPr>
+          <a:xfrm>
+            <a:off x="1042416" y="4206240"/>
             <a:ext cx="2011680" cy="274320"/>
           </a:xfrm>
           <a:prstGeom prst="rect">
@@ -4957,14 +4982,14 @@
       </p:sp>
       <p:sp>
         <p:nvSpPr>
-          <p:cNvPr id="32" name="Text 30"/>
-          <p:cNvSpPr/>
-          <p:nvPr/>
-        </p:nvSpPr>
-        <p:spPr>
-          <a:xfrm>
-            <a:off x="1042416" y="4663440"/>
-            <a:ext cx="4449928" cy="384048"/>
+          <p:cNvPr id="33" name="Text 31"/>
+          <p:cNvSpPr/>
+          <p:nvPr/>
+        </p:nvSpPr>
+        <p:spPr>
+          <a:xfrm>
+            <a:off x="1042416" y="4443984"/>
+            <a:ext cx="4449928" cy="329184"/>
           </a:xfrm>
           <a:prstGeom prst="rect">
             <a:avLst/>
@@ -4983,7 +5008,7 @@
               <a:buNone/>
             </a:pPr>
             <a:r>
-              <a:rPr lang="en-US" sz="1150" dirty="0">
+              <a:rPr lang="en-US" sz="1150" b="1" dirty="0">
                 <a:solidFill>
                   <a:srgbClr val="1F1F1F"/>
                 </a:solidFill>
@@ -4999,13 +5024,13 @@
       </p:sp>
       <p:sp>
         <p:nvSpPr>
-          <p:cNvPr id="33" name="Text 31"/>
-          <p:cNvSpPr/>
-          <p:nvPr/>
-        </p:nvSpPr>
-        <p:spPr>
-          <a:xfrm>
-            <a:off x="6699352" y="4425696"/>
+          <p:cNvPr id="34" name="Text 32"/>
+          <p:cNvSpPr/>
+          <p:nvPr/>
+        </p:nvSpPr>
+        <p:spPr>
+          <a:xfrm>
+            <a:off x="6699352" y="4206240"/>
             <a:ext cx="2011680" cy="274320"/>
           </a:xfrm>
           <a:prstGeom prst="rect">
@@ -5038,14 +5063,14 @@
       </p:sp>
       <p:sp>
         <p:nvSpPr>
-          <p:cNvPr id="34" name="Text 32"/>
-          <p:cNvSpPr/>
-          <p:nvPr/>
-        </p:nvSpPr>
-        <p:spPr>
-          <a:xfrm>
-            <a:off x="6699352" y="4663440"/>
-            <a:ext cx="4449928" cy="384048"/>
+          <p:cNvPr id="35" name="Text 33"/>
+          <p:cNvSpPr/>
+          <p:nvPr/>
+        </p:nvSpPr>
+        <p:spPr>
+          <a:xfrm>
+            <a:off x="6699352" y="4443984"/>
+            <a:ext cx="4449928" cy="329184"/>
           </a:xfrm>
           <a:prstGeom prst="rect">
             <a:avLst/>
@@ -5080,13 +5105,13 @@
       </p:sp>
       <p:sp>
         <p:nvSpPr>
-          <p:cNvPr id="35" name="Shape 33"/>
-          <p:cNvSpPr/>
-          <p:nvPr/>
-        </p:nvSpPr>
-        <p:spPr>
-          <a:xfrm>
-            <a:off x="1042416" y="5029200"/>
+          <p:cNvPr id="36" name="Shape 34"/>
+          <p:cNvSpPr/>
+          <p:nvPr/>
+        </p:nvSpPr>
+        <p:spPr>
+          <a:xfrm>
+            <a:off x="1042416" y="4736592"/>
             <a:ext cx="4449928" cy="7315"/>
           </a:xfrm>
           <a:prstGeom prst="rect">
@@ -5105,13 +5130,13 @@
       </p:sp>
       <p:sp>
         <p:nvSpPr>
-          <p:cNvPr id="36" name="Shape 34"/>
-          <p:cNvSpPr/>
-          <p:nvPr/>
-        </p:nvSpPr>
-        <p:spPr>
-          <a:xfrm>
-            <a:off x="6699352" y="5029200"/>
+          <p:cNvPr id="37" name="Shape 35"/>
+          <p:cNvSpPr/>
+          <p:nvPr/>
+        </p:nvSpPr>
+        <p:spPr>
+          <a:xfrm>
+            <a:off x="6699352" y="4736592"/>
             <a:ext cx="4449928" cy="7315"/>
           </a:xfrm>
           <a:prstGeom prst="rect">
@@ -5130,13 +5155,13 @@
       </p:sp>
       <p:sp>
         <p:nvSpPr>
-          <p:cNvPr id="37" name="Text 35"/>
-          <p:cNvSpPr/>
-          <p:nvPr/>
-        </p:nvSpPr>
-        <p:spPr>
-          <a:xfrm>
-            <a:off x="1042416" y="5084064"/>
+          <p:cNvPr id="38" name="Text 36"/>
+          <p:cNvSpPr/>
+          <p:nvPr/>
+        </p:nvSpPr>
+        <p:spPr>
+          <a:xfrm>
+            <a:off x="1042416" y="4791456"/>
             <a:ext cx="2011680" cy="274320"/>
           </a:xfrm>
           <a:prstGeom prst="rect">
@@ -5169,14 +5194,14 @@
       </p:sp>
       <p:sp>
         <p:nvSpPr>
-          <p:cNvPr id="38" name="Text 36"/>
-          <p:cNvSpPr/>
-          <p:nvPr/>
-        </p:nvSpPr>
-        <p:spPr>
-          <a:xfrm>
-            <a:off x="1042416" y="5321808"/>
-            <a:ext cx="4449928" cy="384048"/>
+          <p:cNvPr id="39" name="Text 37"/>
+          <p:cNvSpPr/>
+          <p:nvPr/>
+        </p:nvSpPr>
+        <p:spPr>
+          <a:xfrm>
+            <a:off x="1042416" y="5029200"/>
+            <a:ext cx="4449928" cy="329184"/>
           </a:xfrm>
           <a:prstGeom prst="rect">
             <a:avLst/>
@@ -5195,7 +5220,7 @@
               <a:buNone/>
             </a:pPr>
             <a:r>
-              <a:rPr lang="en-US" sz="1150" dirty="0">
+              <a:rPr lang="en-US" sz="1150" b="1" dirty="0">
                 <a:solidFill>
                   <a:srgbClr val="1F1F1F"/>
                 </a:solidFill>
@@ -5211,13 +5236,13 @@
       </p:sp>
       <p:sp>
         <p:nvSpPr>
-          <p:cNvPr id="39" name="Text 37"/>
-          <p:cNvSpPr/>
-          <p:nvPr/>
-        </p:nvSpPr>
-        <p:spPr>
-          <a:xfrm>
-            <a:off x="6699352" y="5084064"/>
+          <p:cNvPr id="40" name="Text 38"/>
+          <p:cNvSpPr/>
+          <p:nvPr/>
+        </p:nvSpPr>
+        <p:spPr>
+          <a:xfrm>
+            <a:off x="6699352" y="4791456"/>
             <a:ext cx="2011680" cy="274320"/>
           </a:xfrm>
           <a:prstGeom prst="rect">
@@ -5250,14 +5275,14 @@
       </p:sp>
       <p:sp>
         <p:nvSpPr>
-          <p:cNvPr id="40" name="Text 38"/>
-          <p:cNvSpPr/>
-          <p:nvPr/>
-        </p:nvSpPr>
-        <p:spPr>
-          <a:xfrm>
-            <a:off x="6699352" y="5321808"/>
-            <a:ext cx="4449928" cy="384048"/>
+          <p:cNvPr id="41" name="Text 39"/>
+          <p:cNvSpPr/>
+          <p:nvPr/>
+        </p:nvSpPr>
+        <p:spPr>
+          <a:xfrm>
+            <a:off x="6699352" y="5029200"/>
+            <a:ext cx="4449928" cy="329184"/>
           </a:xfrm>
           <a:prstGeom prst="rect">
             <a:avLst/>
@@ -5292,7 +5317,74 @@
       </p:sp>
       <p:sp>
         <p:nvSpPr>
-          <p:cNvPr id="41" name="Shape 39"/>
+          <p:cNvPr id="42" name="Shape 40"/>
+          <p:cNvSpPr/>
+          <p:nvPr/>
+        </p:nvSpPr>
+        <p:spPr>
+          <a:xfrm>
+            <a:off x="640080" y="5596128"/>
+            <a:ext cx="10911535" cy="7315"/>
+          </a:xfrm>
+          <a:prstGeom prst="rect">
+            <a:avLst/>
+          </a:prstGeom>
+          <a:solidFill>
+            <a:srgbClr val="111111"/>
+          </a:solidFill>
+          <a:ln w="12700">
+            <a:solidFill>
+              <a:srgbClr val="111111"/>
+            </a:solidFill>
+            <a:prstDash val="solid"/>
+          </a:ln>
+        </p:spPr>
+      </p:sp>
+      <p:sp>
+        <p:nvSpPr>
+          <p:cNvPr id="43" name="Text 41"/>
+          <p:cNvSpPr/>
+          <p:nvPr/>
+        </p:nvSpPr>
+        <p:spPr>
+          <a:xfrm>
+            <a:off x="640080" y="5705856"/>
+            <a:ext cx="10911535" cy="402336"/>
+          </a:xfrm>
+          <a:prstGeom prst="rect">
+            <a:avLst/>
+          </a:prstGeom>
+          <a:noFill/>
+          <a:ln/>
+        </p:spPr>
+        <p:txBody>
+          <a:bodyPr wrap="square" lIns="0" tIns="0" rIns="0" bIns="0" rtlCol="0" anchor="t"/>
+          <a:lstStyle/>
+          <a:p>
+            <a:pPr indent="0" marL="0">
+              <a:lnSpc>
+                <a:spcPct val="120000"/>
+              </a:lnSpc>
+              <a:buNone/>
+            </a:pPr>
+            <a:r>
+              <a:rPr lang="en-US" sz="1300" b="1" dirty="0">
+                <a:solidFill>
+                  <a:srgbClr val="111111"/>
+                </a:solidFill>
+                <a:latin typeface="Pretendard" pitchFamily="34" charset="0"/>
+                <a:ea typeface="Pretendard" pitchFamily="34" charset="-122"/>
+                <a:cs typeface="Pretendard" pitchFamily="34" charset="-120"/>
+              </a:rPr>
+              <a:t>읽는 사람은 당신의 프로젝트를 서로 비교하면서 봅니다. 구조가 같아야 비교가 됩니다.</a:t>
+            </a:r>
+            <a:endParaRPr lang="en-US" sz="1300" dirty="0"/>
+          </a:p>
+        </p:txBody>
+      </p:sp>
+      <p:sp>
+        <p:nvSpPr>
+          <p:cNvPr id="44" name="Shape 42"/>
           <p:cNvSpPr/>
           <p:nvPr/>
         </p:nvSpPr>
@@ -5317,7 +5409,7 @@
       </p:sp>
       <p:sp>
         <p:nvSpPr>
-          <p:cNvPr id="42" name="Text 40"/>
+          <p:cNvPr id="45" name="Text 43"/>
           <p:cNvSpPr/>
           <p:nvPr/>
         </p:nvSpPr>
@@ -5356,7 +5448,7 @@
       </p:sp>
       <p:sp>
         <p:nvSpPr>
-          <p:cNvPr id="43" name="Text 41"/>
+          <p:cNvPr id="46" name="Text 44"/>
           <p:cNvSpPr/>
           <p:nvPr/>
         </p:nvSpPr>
@@ -12266,7 +12358,96 @@
         <p:spPr>
           <a:xfrm>
             <a:off x="640080" y="1627632"/>
-            <a:ext cx="5254600" cy="4078224"/>
+            <a:ext cx="5254600" cy="3712464"/>
+          </a:xfrm>
+          <a:prstGeom prst="rect">
+            <a:avLst/>
+          </a:prstGeom>
+          <a:solidFill>
+            <a:srgbClr val="FFFFFF"/>
+          </a:solidFill>
+          <a:ln w="12700">
+            <a:solidFill>
+              <a:srgbClr val="111111"/>
+            </a:solidFill>
+            <a:prstDash val="solid"/>
+          </a:ln>
+        </p:spPr>
+      </p:sp>
+      <p:sp>
+        <p:nvSpPr>
+          <p:cNvPr id="10" name="Shape 8"/>
+          <p:cNvSpPr/>
+          <p:nvPr/>
+        </p:nvSpPr>
+        <p:spPr>
+          <a:xfrm>
+            <a:off x="640080" y="1627632"/>
+            <a:ext cx="5254600" cy="64008"/>
+          </a:xfrm>
+          <a:prstGeom prst="rect">
+            <a:avLst/>
+          </a:prstGeom>
+          <a:solidFill>
+            <a:srgbClr val="111111"/>
+          </a:solidFill>
+          <a:ln w="12700">
+            <a:solidFill>
+              <a:srgbClr val="111111"/>
+            </a:solidFill>
+            <a:prstDash val="solid"/>
+          </a:ln>
+        </p:spPr>
+      </p:sp>
+      <p:sp>
+        <p:nvSpPr>
+          <p:cNvPr id="11" name="Text 9"/>
+          <p:cNvSpPr/>
+          <p:nvPr/>
+        </p:nvSpPr>
+        <p:spPr>
+          <a:xfrm>
+            <a:off x="1042416" y="1901952"/>
+            <a:ext cx="4449928" cy="365760"/>
+          </a:xfrm>
+          <a:prstGeom prst="rect">
+            <a:avLst/>
+          </a:prstGeom>
+          <a:noFill/>
+          <a:ln/>
+        </p:spPr>
+        <p:txBody>
+          <a:bodyPr wrap="square" lIns="0" tIns="0" rIns="0" bIns="0" rtlCol="0" anchor="ctr"/>
+          <a:lstStyle/>
+          <a:p>
+            <a:pPr indent="0" marL="0">
+              <a:buNone/>
+            </a:pPr>
+            <a:r>
+              <a:rPr lang="en-US" sz="1700" dirty="0">
+                <a:solidFill>
+                  <a:srgbClr val="111111"/>
+                </a:solidFill>
+                <a:latin typeface="Pretendard SemiBold" pitchFamily="34" charset="0"/>
+                <a:ea typeface="Pretendard SemiBold" pitchFamily="34" charset="-122"/>
+                <a:cs typeface="Pretendard SemiBold" pitchFamily="34" charset="-120"/>
+              </a:rPr>
+              <a:t>고치기 전</a:t>
+            </a:r>
+            <a:endParaRPr lang="en-US" sz="1700" dirty="0"/>
+          </a:p>
+        </p:txBody>
+      </p:sp>
+      <p:sp>
+        <p:nvSpPr>
+          <p:cNvPr id="12" name="Shape 10"/>
+          <p:cNvSpPr/>
+          <p:nvPr/>
+        </p:nvSpPr>
+        <p:spPr>
+          <a:xfrm>
+            <a:off x="6297016" y="1627632"/>
+            <a:ext cx="5254600" cy="3712464"/>
           </a:xfrm>
           <a:prstGeom prst="rect">
             <a:avLst/>
@@ -12284,13 +12465,13 @@
       </p:sp>
       <p:sp>
         <p:nvSpPr>
-          <p:cNvPr id="10" name="Text 8"/>
-          <p:cNvSpPr/>
-          <p:nvPr/>
-        </p:nvSpPr>
-        <p:spPr>
-          <a:xfrm>
-            <a:off x="1042416" y="1901952"/>
+          <p:cNvPr id="13" name="Text 11"/>
+          <p:cNvSpPr/>
+          <p:nvPr/>
+        </p:nvSpPr>
+        <p:spPr>
+          <a:xfrm>
+            <a:off x="6699352" y="1901952"/>
             <a:ext cx="4449928" cy="365760"/>
           </a:xfrm>
           <a:prstGeom prst="rect">
@@ -12309,13 +12490,13 @@
             <a:r>
               <a:rPr lang="en-US" sz="1700" dirty="0">
                 <a:solidFill>
-                  <a:srgbClr val="111111"/>
+                  <a:srgbClr val="9B9B9B"/>
                 </a:solidFill>
                 <a:latin typeface="Pretendard SemiBold" pitchFamily="34" charset="0"/>
                 <a:ea typeface="Pretendard SemiBold" pitchFamily="34" charset="-122"/>
                 <a:cs typeface="Pretendard SemiBold" pitchFamily="34" charset="-120"/>
               </a:rPr>
-              <a:t>고치기 전</a:t>
+              <a:t>고친 뒤</a:t>
             </a:r>
             <a:endParaRPr lang="en-US" sz="1700" dirty="0"/>
           </a:p>
@@ -12323,71 +12504,7 @@
       </p:sp>
       <p:sp>
         <p:nvSpPr>
-          <p:cNvPr id="11" name="Shape 9"/>
-          <p:cNvSpPr/>
-          <p:nvPr/>
-        </p:nvSpPr>
-        <p:spPr>
-          <a:xfrm>
-            <a:off x="6297016" y="1627632"/>
-            <a:ext cx="5254600" cy="4078224"/>
-          </a:xfrm>
-          <a:prstGeom prst="rect">
-            <a:avLst/>
-          </a:prstGeom>
-          <a:solidFill>
-            <a:srgbClr val="FFFFFF"/>
-          </a:solidFill>
-          <a:ln w="12700">
-            <a:solidFill>
-              <a:srgbClr val="DCDCDC"/>
-            </a:solidFill>
-            <a:prstDash val="solid"/>
-          </a:ln>
-        </p:spPr>
-      </p:sp>
-      <p:sp>
-        <p:nvSpPr>
-          <p:cNvPr id="12" name="Text 10"/>
-          <p:cNvSpPr/>
-          <p:nvPr/>
-        </p:nvSpPr>
-        <p:spPr>
-          <a:xfrm>
-            <a:off x="6699352" y="1901952"/>
-            <a:ext cx="4449928" cy="365760"/>
-          </a:xfrm>
-          <a:prstGeom prst="rect">
-            <a:avLst/>
-          </a:prstGeom>
-          <a:noFill/>
-          <a:ln/>
-        </p:spPr>
-        <p:txBody>
-          <a:bodyPr wrap="square" lIns="0" tIns="0" rIns="0" bIns="0" rtlCol="0" anchor="ctr"/>
-          <a:lstStyle/>
-          <a:p>
-            <a:pPr indent="0" marL="0">
-              <a:buNone/>
-            </a:pPr>
-            <a:r>
-              <a:rPr lang="en-US" sz="1700" dirty="0">
-                <a:solidFill>
-                  <a:srgbClr val="9B9B9B"/>
-                </a:solidFill>
-                <a:latin typeface="Pretendard SemiBold" pitchFamily="34" charset="0"/>
-                <a:ea typeface="Pretendard SemiBold" pitchFamily="34" charset="-122"/>
-                <a:cs typeface="Pretendard SemiBold" pitchFamily="34" charset="-120"/>
-              </a:rPr>
-              <a:t>고친 뒤</a:t>
-            </a:r>
-            <a:endParaRPr lang="en-US" sz="1700" dirty="0"/>
-          </a:p>
-        </p:txBody>
-      </p:sp>
-      <p:sp>
-        <p:nvSpPr>
-          <p:cNvPr id="13" name="Text 11"/>
+          <p:cNvPr id="14" name="Text 12"/>
           <p:cNvSpPr/>
           <p:nvPr/>
         </p:nvSpPr>
@@ -12426,14 +12543,14 @@
       </p:sp>
       <p:sp>
         <p:nvSpPr>
-          <p:cNvPr id="14" name="Text 12"/>
+          <p:cNvPr id="15" name="Text 13"/>
           <p:cNvSpPr/>
           <p:nvPr/>
         </p:nvSpPr>
         <p:spPr>
           <a:xfrm>
             <a:off x="1042416" y="2688336"/>
-            <a:ext cx="4449928" cy="384048"/>
+            <a:ext cx="4449928" cy="329184"/>
           </a:xfrm>
           <a:prstGeom prst="rect">
             <a:avLst/>
@@ -12452,7 +12569,7 @@
               <a:buNone/>
             </a:pPr>
             <a:r>
-              <a:rPr lang="en-US" sz="1150" dirty="0">
+              <a:rPr lang="en-US" sz="1150" b="1" dirty="0">
                 <a:solidFill>
                   <a:srgbClr val="1F1F1F"/>
                 </a:solidFill>
@@ -12468,7 +12585,7 @@
       </p:sp>
       <p:sp>
         <p:nvSpPr>
-          <p:cNvPr id="15" name="Text 13"/>
+          <p:cNvPr id="16" name="Text 14"/>
           <p:cNvSpPr/>
           <p:nvPr/>
         </p:nvSpPr>
@@ -12507,14 +12624,14 @@
       </p:sp>
       <p:sp>
         <p:nvSpPr>
-          <p:cNvPr id="16" name="Text 14"/>
+          <p:cNvPr id="17" name="Text 15"/>
           <p:cNvSpPr/>
           <p:nvPr/>
         </p:nvSpPr>
         <p:spPr>
           <a:xfrm>
             <a:off x="6699352" y="2688336"/>
-            <a:ext cx="4449928" cy="384048"/>
+            <a:ext cx="4449928" cy="329184"/>
           </a:xfrm>
           <a:prstGeom prst="rect">
             <a:avLst/>
@@ -12549,13 +12666,13 @@
       </p:sp>
       <p:sp>
         <p:nvSpPr>
-          <p:cNvPr id="17" name="Shape 15"/>
-          <p:cNvSpPr/>
-          <p:nvPr/>
-        </p:nvSpPr>
-        <p:spPr>
-          <a:xfrm>
-            <a:off x="1042416" y="3054096"/>
+          <p:cNvPr id="18" name="Shape 16"/>
+          <p:cNvSpPr/>
+          <p:nvPr/>
+        </p:nvSpPr>
+        <p:spPr>
+          <a:xfrm>
+            <a:off x="1042416" y="2980944"/>
             <a:ext cx="4449928" cy="7315"/>
           </a:xfrm>
           <a:prstGeom prst="rect">
@@ -12574,13 +12691,13 @@
       </p:sp>
       <p:sp>
         <p:nvSpPr>
-          <p:cNvPr id="18" name="Shape 16"/>
-          <p:cNvSpPr/>
-          <p:nvPr/>
-        </p:nvSpPr>
-        <p:spPr>
-          <a:xfrm>
-            <a:off x="6699352" y="3054096"/>
+          <p:cNvPr id="19" name="Shape 17"/>
+          <p:cNvSpPr/>
+          <p:nvPr/>
+        </p:nvSpPr>
+        <p:spPr>
+          <a:xfrm>
+            <a:off x="6699352" y="2980944"/>
             <a:ext cx="4449928" cy="7315"/>
           </a:xfrm>
           <a:prstGeom prst="rect">
@@ -12599,13 +12716,13 @@
       </p:sp>
       <p:sp>
         <p:nvSpPr>
-          <p:cNvPr id="19" name="Text 17"/>
-          <p:cNvSpPr/>
-          <p:nvPr/>
-        </p:nvSpPr>
-        <p:spPr>
-          <a:xfrm>
-            <a:off x="1042416" y="3108960"/>
+          <p:cNvPr id="20" name="Text 18"/>
+          <p:cNvSpPr/>
+          <p:nvPr/>
+        </p:nvSpPr>
+        <p:spPr>
+          <a:xfrm>
+            <a:off x="1042416" y="3035808"/>
             <a:ext cx="2011680" cy="274320"/>
           </a:xfrm>
           <a:prstGeom prst="rect">
@@ -12638,14 +12755,14 @@
       </p:sp>
       <p:sp>
         <p:nvSpPr>
-          <p:cNvPr id="20" name="Text 18"/>
-          <p:cNvSpPr/>
-          <p:nvPr/>
-        </p:nvSpPr>
-        <p:spPr>
-          <a:xfrm>
-            <a:off x="1042416" y="3346704"/>
-            <a:ext cx="4449928" cy="384048"/>
+          <p:cNvPr id="21" name="Text 19"/>
+          <p:cNvSpPr/>
+          <p:nvPr/>
+        </p:nvSpPr>
+        <p:spPr>
+          <a:xfrm>
+            <a:off x="1042416" y="3273552"/>
+            <a:ext cx="4449928" cy="329184"/>
           </a:xfrm>
           <a:prstGeom prst="rect">
             <a:avLst/>
@@ -12664,7 +12781,7 @@
               <a:buNone/>
             </a:pPr>
             <a:r>
-              <a:rPr lang="en-US" sz="1150" dirty="0">
+              <a:rPr lang="en-US" sz="1150" b="1" dirty="0">
                 <a:solidFill>
                   <a:srgbClr val="1F1F1F"/>
                 </a:solidFill>
@@ -12680,13 +12797,13 @@
       </p:sp>
       <p:sp>
         <p:nvSpPr>
-          <p:cNvPr id="21" name="Text 19"/>
-          <p:cNvSpPr/>
-          <p:nvPr/>
-        </p:nvSpPr>
-        <p:spPr>
-          <a:xfrm>
-            <a:off x="6699352" y="3108960"/>
+          <p:cNvPr id="22" name="Text 20"/>
+          <p:cNvSpPr/>
+          <p:nvPr/>
+        </p:nvSpPr>
+        <p:spPr>
+          <a:xfrm>
+            <a:off x="6699352" y="3035808"/>
             <a:ext cx="2011680" cy="274320"/>
           </a:xfrm>
           <a:prstGeom prst="rect">
@@ -12719,14 +12836,14 @@
       </p:sp>
       <p:sp>
         <p:nvSpPr>
-          <p:cNvPr id="22" name="Text 20"/>
-          <p:cNvSpPr/>
-          <p:nvPr/>
-        </p:nvSpPr>
-        <p:spPr>
-          <a:xfrm>
-            <a:off x="6699352" y="3346704"/>
-            <a:ext cx="4449928" cy="384048"/>
+          <p:cNvPr id="23" name="Text 21"/>
+          <p:cNvSpPr/>
+          <p:nvPr/>
+        </p:nvSpPr>
+        <p:spPr>
+          <a:xfrm>
+            <a:off x="6699352" y="3273552"/>
+            <a:ext cx="4449928" cy="329184"/>
           </a:xfrm>
           <a:prstGeom prst="rect">
             <a:avLst/>
@@ -12761,13 +12878,13 @@
       </p:sp>
       <p:sp>
         <p:nvSpPr>
-          <p:cNvPr id="23" name="Shape 21"/>
-          <p:cNvSpPr/>
-          <p:nvPr/>
-        </p:nvSpPr>
-        <p:spPr>
-          <a:xfrm>
-            <a:off x="1042416" y="3712464"/>
+          <p:cNvPr id="24" name="Shape 22"/>
+          <p:cNvSpPr/>
+          <p:nvPr/>
+        </p:nvSpPr>
+        <p:spPr>
+          <a:xfrm>
+            <a:off x="1042416" y="3566160"/>
             <a:ext cx="4449928" cy="7315"/>
           </a:xfrm>
           <a:prstGeom prst="rect">
@@ -12786,13 +12903,13 @@
       </p:sp>
       <p:sp>
         <p:nvSpPr>
-          <p:cNvPr id="24" name="Shape 22"/>
-          <p:cNvSpPr/>
-          <p:nvPr/>
-        </p:nvSpPr>
-        <p:spPr>
-          <a:xfrm>
-            <a:off x="6699352" y="3712464"/>
+          <p:cNvPr id="25" name="Shape 23"/>
+          <p:cNvSpPr/>
+          <p:nvPr/>
+        </p:nvSpPr>
+        <p:spPr>
+          <a:xfrm>
+            <a:off x="6699352" y="3566160"/>
             <a:ext cx="4449928" cy="7315"/>
           </a:xfrm>
           <a:prstGeom prst="rect">
@@ -12811,13 +12928,13 @@
       </p:sp>
       <p:sp>
         <p:nvSpPr>
-          <p:cNvPr id="25" name="Text 23"/>
-          <p:cNvSpPr/>
-          <p:nvPr/>
-        </p:nvSpPr>
-        <p:spPr>
-          <a:xfrm>
-            <a:off x="1042416" y="3767328"/>
+          <p:cNvPr id="26" name="Text 24"/>
+          <p:cNvSpPr/>
+          <p:nvPr/>
+        </p:nvSpPr>
+        <p:spPr>
+          <a:xfrm>
+            <a:off x="1042416" y="3621024"/>
             <a:ext cx="2011680" cy="274320"/>
           </a:xfrm>
           <a:prstGeom prst="rect">
@@ -12850,14 +12967,14 @@
       </p:sp>
       <p:sp>
         <p:nvSpPr>
-          <p:cNvPr id="26" name="Text 24"/>
-          <p:cNvSpPr/>
-          <p:nvPr/>
-        </p:nvSpPr>
-        <p:spPr>
-          <a:xfrm>
-            <a:off x="1042416" y="4005072"/>
-            <a:ext cx="4449928" cy="384048"/>
+          <p:cNvPr id="27" name="Text 25"/>
+          <p:cNvSpPr/>
+          <p:nvPr/>
+        </p:nvSpPr>
+        <p:spPr>
+          <a:xfrm>
+            <a:off x="1042416" y="3858768"/>
+            <a:ext cx="4449928" cy="329184"/>
           </a:xfrm>
           <a:prstGeom prst="rect">
             <a:avLst/>
@@ -12876,7 +12993,7 @@
               <a:buNone/>
             </a:pPr>
             <a:r>
-              <a:rPr lang="en-US" sz="1150" dirty="0">
+              <a:rPr lang="en-US" sz="1150" b="1" dirty="0">
                 <a:solidFill>
                   <a:srgbClr val="1F1F1F"/>
                 </a:solidFill>
@@ -12892,13 +13009,13 @@
       </p:sp>
       <p:sp>
         <p:nvSpPr>
-          <p:cNvPr id="27" name="Text 25"/>
-          <p:cNvSpPr/>
-          <p:nvPr/>
-        </p:nvSpPr>
-        <p:spPr>
-          <a:xfrm>
-            <a:off x="6699352" y="3767328"/>
+          <p:cNvPr id="28" name="Text 26"/>
+          <p:cNvSpPr/>
+          <p:nvPr/>
+        </p:nvSpPr>
+        <p:spPr>
+          <a:xfrm>
+            <a:off x="6699352" y="3621024"/>
             <a:ext cx="2011680" cy="274320"/>
           </a:xfrm>
           <a:prstGeom prst="rect">
@@ -12931,14 +13048,14 @@
       </p:sp>
       <p:sp>
         <p:nvSpPr>
-          <p:cNvPr id="28" name="Text 26"/>
-          <p:cNvSpPr/>
-          <p:nvPr/>
-        </p:nvSpPr>
-        <p:spPr>
-          <a:xfrm>
-            <a:off x="6699352" y="4005072"/>
-            <a:ext cx="4449928" cy="384048"/>
+          <p:cNvPr id="29" name="Text 27"/>
+          <p:cNvSpPr/>
+          <p:nvPr/>
+        </p:nvSpPr>
+        <p:spPr>
+          <a:xfrm>
+            <a:off x="6699352" y="3858768"/>
+            <a:ext cx="4449928" cy="329184"/>
           </a:xfrm>
           <a:prstGeom prst="rect">
             <a:avLst/>
@@ -12973,13 +13090,13 @@
       </p:sp>
       <p:sp>
         <p:nvSpPr>
-          <p:cNvPr id="29" name="Shape 27"/>
-          <p:cNvSpPr/>
-          <p:nvPr/>
-        </p:nvSpPr>
-        <p:spPr>
-          <a:xfrm>
-            <a:off x="1042416" y="4370832"/>
+          <p:cNvPr id="30" name="Shape 28"/>
+          <p:cNvSpPr/>
+          <p:nvPr/>
+        </p:nvSpPr>
+        <p:spPr>
+          <a:xfrm>
+            <a:off x="1042416" y="4151376"/>
             <a:ext cx="4449928" cy="7315"/>
           </a:xfrm>
           <a:prstGeom prst="rect">
@@ -12998,13 +13115,13 @@
       </p:sp>
       <p:sp>
         <p:nvSpPr>
-          <p:cNvPr id="30" name="Shape 28"/>
-          <p:cNvSpPr/>
-          <p:nvPr/>
-        </p:nvSpPr>
-        <p:spPr>
-          <a:xfrm>
-            <a:off x="6699352" y="4370832"/>
+          <p:cNvPr id="31" name="Shape 29"/>
+          <p:cNvSpPr/>
+          <p:nvPr/>
+        </p:nvSpPr>
+        <p:spPr>
+          <a:xfrm>
+            <a:off x="6699352" y="4151376"/>
             <a:ext cx="4449928" cy="7315"/>
           </a:xfrm>
           <a:prstGeom prst="rect">
@@ -13023,13 +13140,13 @@
       </p:sp>
       <p:sp>
         <p:nvSpPr>
-          <p:cNvPr id="31" name="Text 29"/>
-          <p:cNvSpPr/>
-          <p:nvPr/>
-        </p:nvSpPr>
-        <p:spPr>
-          <a:xfrm>
-            <a:off x="1042416" y="4425696"/>
+          <p:cNvPr id="32" name="Text 30"/>
+          <p:cNvSpPr/>
+          <p:nvPr/>
+        </p:nvSpPr>
+        <p:spPr>
+          <a:xfrm>
+            <a:off x="1042416" y="4206240"/>
             <a:ext cx="2011680" cy="274320"/>
           </a:xfrm>
           <a:prstGeom prst="rect">
@@ -13062,14 +13179,14 @@
       </p:sp>
       <p:sp>
         <p:nvSpPr>
-          <p:cNvPr id="32" name="Text 30"/>
-          <p:cNvSpPr/>
-          <p:nvPr/>
-        </p:nvSpPr>
-        <p:spPr>
-          <a:xfrm>
-            <a:off x="1042416" y="4663440"/>
-            <a:ext cx="4449928" cy="384048"/>
+          <p:cNvPr id="33" name="Text 31"/>
+          <p:cNvSpPr/>
+          <p:nvPr/>
+        </p:nvSpPr>
+        <p:spPr>
+          <a:xfrm>
+            <a:off x="1042416" y="4443984"/>
+            <a:ext cx="4449928" cy="329184"/>
           </a:xfrm>
           <a:prstGeom prst="rect">
             <a:avLst/>
@@ -13088,7 +13205,7 @@
               <a:buNone/>
             </a:pPr>
             <a:r>
-              <a:rPr lang="en-US" sz="1150" dirty="0">
+              <a:rPr lang="en-US" sz="1150" b="1" dirty="0">
                 <a:solidFill>
                   <a:srgbClr val="1F1F1F"/>
                 </a:solidFill>
@@ -13104,13 +13221,13 @@
       </p:sp>
       <p:sp>
         <p:nvSpPr>
-          <p:cNvPr id="33" name="Text 31"/>
-          <p:cNvSpPr/>
-          <p:nvPr/>
-        </p:nvSpPr>
-        <p:spPr>
-          <a:xfrm>
-            <a:off x="6699352" y="4425696"/>
+          <p:cNvPr id="34" name="Text 32"/>
+          <p:cNvSpPr/>
+          <p:nvPr/>
+        </p:nvSpPr>
+        <p:spPr>
+          <a:xfrm>
+            <a:off x="6699352" y="4206240"/>
             <a:ext cx="2011680" cy="274320"/>
           </a:xfrm>
           <a:prstGeom prst="rect">
@@ -13143,14 +13260,14 @@
       </p:sp>
       <p:sp>
         <p:nvSpPr>
-          <p:cNvPr id="34" name="Text 32"/>
-          <p:cNvSpPr/>
-          <p:nvPr/>
-        </p:nvSpPr>
-        <p:spPr>
-          <a:xfrm>
-            <a:off x="6699352" y="4663440"/>
-            <a:ext cx="4449928" cy="384048"/>
+          <p:cNvPr id="35" name="Text 33"/>
+          <p:cNvSpPr/>
+          <p:nvPr/>
+        </p:nvSpPr>
+        <p:spPr>
+          <a:xfrm>
+            <a:off x="6699352" y="4443984"/>
+            <a:ext cx="4449928" cy="329184"/>
           </a:xfrm>
           <a:prstGeom prst="rect">
             <a:avLst/>
@@ -13185,13 +13302,13 @@
       </p:sp>
       <p:sp>
         <p:nvSpPr>
-          <p:cNvPr id="35" name="Shape 33"/>
-          <p:cNvSpPr/>
-          <p:nvPr/>
-        </p:nvSpPr>
-        <p:spPr>
-          <a:xfrm>
-            <a:off x="1042416" y="5029200"/>
+          <p:cNvPr id="36" name="Shape 34"/>
+          <p:cNvSpPr/>
+          <p:nvPr/>
+        </p:nvSpPr>
+        <p:spPr>
+          <a:xfrm>
+            <a:off x="1042416" y="4736592"/>
             <a:ext cx="4449928" cy="7315"/>
           </a:xfrm>
           <a:prstGeom prst="rect">
@@ -13210,13 +13327,13 @@
       </p:sp>
       <p:sp>
         <p:nvSpPr>
-          <p:cNvPr id="36" name="Shape 34"/>
-          <p:cNvSpPr/>
-          <p:nvPr/>
-        </p:nvSpPr>
-        <p:spPr>
-          <a:xfrm>
-            <a:off x="6699352" y="5029200"/>
+          <p:cNvPr id="37" name="Shape 35"/>
+          <p:cNvSpPr/>
+          <p:nvPr/>
+        </p:nvSpPr>
+        <p:spPr>
+          <a:xfrm>
+            <a:off x="6699352" y="4736592"/>
             <a:ext cx="4449928" cy="7315"/>
           </a:xfrm>
           <a:prstGeom prst="rect">
@@ -13235,13 +13352,13 @@
       </p:sp>
       <p:sp>
         <p:nvSpPr>
-          <p:cNvPr id="37" name="Text 35"/>
-          <p:cNvSpPr/>
-          <p:nvPr/>
-        </p:nvSpPr>
-        <p:spPr>
-          <a:xfrm>
-            <a:off x="1042416" y="5084064"/>
+          <p:cNvPr id="38" name="Text 36"/>
+          <p:cNvSpPr/>
+          <p:nvPr/>
+        </p:nvSpPr>
+        <p:spPr>
+          <a:xfrm>
+            <a:off x="1042416" y="4791456"/>
             <a:ext cx="2011680" cy="274320"/>
           </a:xfrm>
           <a:prstGeom prst="rect">
@@ -13274,14 +13391,14 @@
       </p:sp>
       <p:sp>
         <p:nvSpPr>
-          <p:cNvPr id="38" name="Text 36"/>
-          <p:cNvSpPr/>
-          <p:nvPr/>
-        </p:nvSpPr>
-        <p:spPr>
-          <a:xfrm>
-            <a:off x="1042416" y="5321808"/>
-            <a:ext cx="4449928" cy="384048"/>
+          <p:cNvPr id="39" name="Text 37"/>
+          <p:cNvSpPr/>
+          <p:nvPr/>
+        </p:nvSpPr>
+        <p:spPr>
+          <a:xfrm>
+            <a:off x="1042416" y="5029200"/>
+            <a:ext cx="4449928" cy="329184"/>
           </a:xfrm>
           <a:prstGeom prst="rect">
             <a:avLst/>
@@ -13300,7 +13417,7 @@
               <a:buNone/>
             </a:pPr>
             <a:r>
-              <a:rPr lang="en-US" sz="1150" dirty="0">
+              <a:rPr lang="en-US" sz="1150" b="1" dirty="0">
                 <a:solidFill>
                   <a:srgbClr val="1F1F1F"/>
                 </a:solidFill>
@@ -13316,13 +13433,13 @@
       </p:sp>
       <p:sp>
         <p:nvSpPr>
-          <p:cNvPr id="39" name="Text 37"/>
-          <p:cNvSpPr/>
-          <p:nvPr/>
-        </p:nvSpPr>
-        <p:spPr>
-          <a:xfrm>
-            <a:off x="6699352" y="5084064"/>
+          <p:cNvPr id="40" name="Text 38"/>
+          <p:cNvSpPr/>
+          <p:nvPr/>
+        </p:nvSpPr>
+        <p:spPr>
+          <a:xfrm>
+            <a:off x="6699352" y="4791456"/>
             <a:ext cx="2011680" cy="274320"/>
           </a:xfrm>
           <a:prstGeom prst="rect">
@@ -13355,14 +13472,14 @@
       </p:sp>
       <p:sp>
         <p:nvSpPr>
-          <p:cNvPr id="40" name="Text 38"/>
-          <p:cNvSpPr/>
-          <p:nvPr/>
-        </p:nvSpPr>
-        <p:spPr>
-          <a:xfrm>
-            <a:off x="6699352" y="5321808"/>
-            <a:ext cx="4449928" cy="384048"/>
+          <p:cNvPr id="41" name="Text 39"/>
+          <p:cNvSpPr/>
+          <p:nvPr/>
+        </p:nvSpPr>
+        <p:spPr>
+          <a:xfrm>
+            <a:off x="6699352" y="5029200"/>
+            <a:ext cx="4449928" cy="329184"/>
           </a:xfrm>
           <a:prstGeom prst="rect">
             <a:avLst/>
@@ -13397,7 +13514,74 @@
       </p:sp>
       <p:sp>
         <p:nvSpPr>
-          <p:cNvPr id="41" name="Shape 39"/>
+          <p:cNvPr id="42" name="Shape 40"/>
+          <p:cNvSpPr/>
+          <p:nvPr/>
+        </p:nvSpPr>
+        <p:spPr>
+          <a:xfrm>
+            <a:off x="640080" y="5596128"/>
+            <a:ext cx="10911535" cy="7315"/>
+          </a:xfrm>
+          <a:prstGeom prst="rect">
+            <a:avLst/>
+          </a:prstGeom>
+          <a:solidFill>
+            <a:srgbClr val="111111"/>
+          </a:solidFill>
+          <a:ln w="12700">
+            <a:solidFill>
+              <a:srgbClr val="111111"/>
+            </a:solidFill>
+            <a:prstDash val="solid"/>
+          </a:ln>
+        </p:spPr>
+      </p:sp>
+      <p:sp>
+        <p:nvSpPr>
+          <p:cNvPr id="43" name="Text 41"/>
+          <p:cNvSpPr/>
+          <p:nvPr/>
+        </p:nvSpPr>
+        <p:spPr>
+          <a:xfrm>
+            <a:off x="640080" y="5705856"/>
+            <a:ext cx="10911535" cy="402336"/>
+          </a:xfrm>
+          <a:prstGeom prst="rect">
+            <a:avLst/>
+          </a:prstGeom>
+          <a:noFill/>
+          <a:ln/>
+        </p:spPr>
+        <p:txBody>
+          <a:bodyPr wrap="square" lIns="0" tIns="0" rIns="0" bIns="0" rtlCol="0" anchor="t"/>
+          <a:lstStyle/>
+          <a:p>
+            <a:pPr indent="0" marL="0">
+              <a:lnSpc>
+                <a:spcPct val="120000"/>
+              </a:lnSpc>
+              <a:buNone/>
+            </a:pPr>
+            <a:r>
+              <a:rPr lang="en-US" sz="1300" b="1" dirty="0">
+                <a:solidFill>
+                  <a:srgbClr val="111111"/>
+                </a:solidFill>
+                <a:latin typeface="Pretendard" pitchFamily="34" charset="0"/>
+                <a:ea typeface="Pretendard" pitchFamily="34" charset="-122"/>
+                <a:cs typeface="Pretendard" pitchFamily="34" charset="-120"/>
+              </a:rPr>
+              <a:t>좁혀지는 것이 좋습니다. 포트폴리오에서 '무엇이든 할 수 있다'는 아무것도 못 한다는 말로 읽힙니다.</a:t>
+            </a:r>
+            <a:endParaRPr lang="en-US" sz="1300" dirty="0"/>
+          </a:p>
+        </p:txBody>
+      </p:sp>
+      <p:sp>
+        <p:nvSpPr>
+          <p:cNvPr id="44" name="Shape 42"/>
           <p:cNvSpPr/>
           <p:nvPr/>
         </p:nvSpPr>
@@ -13422,7 +13606,7 @@
       </p:sp>
       <p:sp>
         <p:nvSpPr>
-          <p:cNvPr id="42" name="Text 40"/>
+          <p:cNvPr id="45" name="Text 43"/>
           <p:cNvSpPr/>
           <p:nvPr/>
         </p:nvSpPr>
@@ -13461,7 +13645,7 @@
       </p:sp>
       <p:sp>
         <p:nvSpPr>
-          <p:cNvPr id="43" name="Text 41"/>
+          <p:cNvPr id="46" name="Text 44"/>
           <p:cNvSpPr/>
           <p:nvPr/>
         </p:nvSpPr>
